--- a/curriculum/M01/W09/L02/slides.pptx
+++ b/curriculum/M01/W09/L02/slides.pptx
@@ -6666,11 +6666,40 @@
                 <a:ea typeface="Malgun Gothic"/>
                 <a:cs typeface="Malgun Gothic"/>
               </a:rPr>
-              <a:t>: pH 7에서 ATP는 −4의 전하를 띠고, 음전하가 좁은 공간에 몰려 있어 서로 반발한다. 가수분해로 조각이 나뉘면 이 반발이 줄어든다. 2. </a:t>
-            </a:r>
+              <a:t>: pH 7에서 ATP는 −4의 전하를 띠고, 음전하가 좁은 공간에 몰려 있어 서로 반발한다. 가수분해로 조각이 나뉘면 이 반발이 줄어든다.</a:t>
+            </a:r>
+          </a:p>
+          <a:p>
+            <a:pPr>
+              <a:spcAft>
+                <a:spcPts val="900"/>
+              </a:spcAft>
+            </a:pPr>
             <a:r>
               <a:rPr sz="1400" b="1" i="0">
                 <a:solidFill>
+                  <a:srgbClr val="F2B705"/>
+                </a:solidFill>
+                <a:latin typeface="Malgun Gothic"/>
+                <a:ea typeface="Malgun Gothic"/>
+                <a:cs typeface="Malgun Gothic"/>
+              </a:rPr>
+              <a:t>•  </a:t>
+            </a:r>
+            <a:r>
+              <a:rPr sz="1400" b="0" i="0">
+                <a:solidFill>
+                  <a:srgbClr val="11202B"/>
+                </a:solidFill>
+                <a:latin typeface="Malgun Gothic"/>
+                <a:ea typeface="Malgun Gothic"/>
+                <a:cs typeface="Malgun Gothic"/>
+              </a:rPr>
+              <a:t>2. </a:t>
+            </a:r>
+            <a:r>
+              <a:rPr sz="1400" b="1" i="0">
+                <a:solidFill>
                   <a:srgbClr val="11202B"/>
                 </a:solidFill>
                 <a:latin typeface="Malgun Gothic"/>
@@ -6688,7 +6717,36 @@
                 <a:ea typeface="Malgun Gothic"/>
                 <a:cs typeface="Malgun Gothic"/>
               </a:rPr>
-              <a:t>: 떨어져 나온 무기인산(Pᵢ)은 공명으로 전자가 네 산소에 분산되어 안정하다. ATP의 γ-인산은 β-인산과 결합해 있어 이 공명이 제한된다. 3. </a:t>
+              <a:t>: 떨어져 나온 무기인산(Pᵢ)은 공명으로 전자가 네 산소에 분산되어 안정하다. ATP의 γ-인산은 β-인산과 결합해 있어 이 공명이 제한된다.</a:t>
+            </a:r>
+          </a:p>
+          <a:p>
+            <a:pPr>
+              <a:spcAft>
+                <a:spcPts val="900"/>
+              </a:spcAft>
+            </a:pPr>
+            <a:r>
+              <a:rPr sz="1400" b="1" i="0">
+                <a:solidFill>
+                  <a:srgbClr val="F2B705"/>
+                </a:solidFill>
+                <a:latin typeface="Malgun Gothic"/>
+                <a:ea typeface="Malgun Gothic"/>
+                <a:cs typeface="Malgun Gothic"/>
+              </a:rPr>
+              <a:t>•  </a:t>
+            </a:r>
+            <a:r>
+              <a:rPr sz="1400" b="0" i="0">
+                <a:solidFill>
+                  <a:srgbClr val="11202B"/>
+                </a:solidFill>
+                <a:latin typeface="Malgun Gothic"/>
+                <a:ea typeface="Malgun Gothic"/>
+                <a:cs typeface="Malgun Gothic"/>
+              </a:rPr>
+              <a:t>3. </a:t>
             </a:r>
             <a:r>
               <a:rPr sz="1400" b="1" i="0">
